--- a/presentation/Presentation_trajectoires_etudiants_ENSAI_version_CER.pptx
+++ b/presentation/Presentation_trajectoires_etudiants_ENSAI_version_CER.pptx
@@ -5,10 +5,10 @@
     <p:sldMasterId id="2147483650" r:id="rId4"/>
   </p:sldMasterIdLst>
   <p:notesMasterIdLst>
-    <p:notesMasterId r:id="rId21"/>
+    <p:notesMasterId r:id="rId36"/>
   </p:notesMasterIdLst>
   <p:handoutMasterIdLst>
-    <p:handoutMasterId r:id="rId22"/>
+    <p:handoutMasterId r:id="rId37"/>
   </p:handoutMasterIdLst>
   <p:sldIdLst>
     <p:sldId id="259" r:id="rId5"/>
@@ -27,6 +27,21 @@
     <p:sldId id="301" r:id="rId18"/>
     <p:sldId id="318" r:id="rId19"/>
     <p:sldId id="277" r:id="rId20"/>
+    <p:sldId id="325" r:id="rId21"/>
+    <p:sldId id="326" r:id="rId22"/>
+    <p:sldId id="324" r:id="rId23"/>
+    <p:sldId id="327" r:id="rId24"/>
+    <p:sldId id="328" r:id="rId25"/>
+    <p:sldId id="329" r:id="rId26"/>
+    <p:sldId id="330" r:id="rId27"/>
+    <p:sldId id="331" r:id="rId28"/>
+    <p:sldId id="332" r:id="rId29"/>
+    <p:sldId id="333" r:id="rId30"/>
+    <p:sldId id="334" r:id="rId31"/>
+    <p:sldId id="335" r:id="rId32"/>
+    <p:sldId id="336" r:id="rId33"/>
+    <p:sldId id="338" r:id="rId34"/>
+    <p:sldId id="337" r:id="rId35"/>
   </p:sldIdLst>
   <p:sldSz cx="12192000" cy="6858000"/>
   <p:notesSz cx="9926638" cy="6797675"/>
@@ -2733,7 +2748,7 @@
           <a:p>
             <a:fld id="{E7FCCED0-103C-4C10-8D72-99DD07E324A0}" type="datetimeFigureOut">
               <a:rPr lang="fr-FR" smtClean="0"/>
-              <a:t>01/07/2026</a:t>
+              <a:t>18/08/2026</a:t>
             </a:fld>
             <a:endParaRPr lang="fr-FR"/>
           </a:p>
@@ -2898,7 +2913,7 @@
           <a:p>
             <a:fld id="{EF258B95-F104-4A72-A4BF-C3A46957C253}" type="datetimeFigureOut">
               <a:rPr lang="fr-FR" smtClean="0"/>
-              <a:t>01/07/2026</a:t>
+              <a:t>18/08/2026</a:t>
             </a:fld>
             <a:endParaRPr lang="fr-FR"/>
           </a:p>
@@ -9708,6 +9723,487 @@
 </p:sld>
 </file>
 
+<file path=ppt/slides/slide17.xml><?xml version="1.0" encoding="utf-8"?>
+<p:sld xmlns:a="http://schemas.openxmlformats.org/drawingml/2006/main" xmlns:r="http://schemas.openxmlformats.org/officeDocument/2006/relationships" xmlns:p="http://schemas.openxmlformats.org/presentationml/2006/main">
+  <p:cSld>
+    <p:spTree>
+      <p:nvGrpSpPr>
+        <p:cNvPr id="1" name=""/>
+        <p:cNvGrpSpPr/>
+        <p:nvPr/>
+      </p:nvGrpSpPr>
+      <p:grpSpPr>
+        <a:xfrm>
+          <a:off x="0" y="0"/>
+          <a:ext cx="0" cy="0"/>
+          <a:chOff x="0" y="0"/>
+          <a:chExt cx="0" cy="0"/>
+        </a:xfrm>
+      </p:grpSpPr>
+      <p:pic>
+        <p:nvPicPr>
+          <p:cNvPr id="5" name="Image 4">
+            <a:extLst>
+              <a:ext uri="{FF2B5EF4-FFF2-40B4-BE49-F238E27FC236}">
+                <a16:creationId xmlns:a16="http://schemas.microsoft.com/office/drawing/2014/main" id="{4D640CED-1DD4-F073-AE81-D730455F0466}"/>
+              </a:ext>
+            </a:extLst>
+          </p:cNvPr>
+          <p:cNvPicPr>
+            <a:picLocks noChangeAspect="1"/>
+          </p:cNvPicPr>
+          <p:nvPr/>
+        </p:nvPicPr>
+        <p:blipFill>
+          <a:blip r:embed="rId2"/>
+          <a:stretch>
+            <a:fillRect/>
+          </a:stretch>
+        </p:blipFill>
+        <p:spPr>
+          <a:xfrm>
+            <a:off x="1651022" y="1592936"/>
+            <a:ext cx="8268854" cy="5106113"/>
+          </a:xfrm>
+          <a:prstGeom prst="rect">
+            <a:avLst/>
+          </a:prstGeom>
+        </p:spPr>
+      </p:pic>
+      <p:sp>
+        <p:nvSpPr>
+          <p:cNvPr id="7" name="Titre 1">
+            <a:extLst>
+              <a:ext uri="{FF2B5EF4-FFF2-40B4-BE49-F238E27FC236}">
+                <a16:creationId xmlns:a16="http://schemas.microsoft.com/office/drawing/2014/main" id="{94F34E49-5E1E-DEDD-4C87-BF52C992E59D}"/>
+              </a:ext>
+            </a:extLst>
+          </p:cNvPr>
+          <p:cNvSpPr txBox="1">
+            <a:spLocks/>
+          </p:cNvSpPr>
+          <p:nvPr/>
+        </p:nvSpPr>
+        <p:spPr>
+          <a:xfrm>
+            <a:off x="990600" y="517525"/>
+            <a:ext cx="10515600" cy="1325563"/>
+          </a:xfrm>
+          <a:prstGeom prst="rect">
+            <a:avLst/>
+          </a:prstGeom>
+        </p:spPr>
+        <p:txBody>
+          <a:bodyPr/>
+          <a:lstStyle>
+            <a:lvl1pPr algn="l" defTabSz="914400" rtl="0" eaLnBrk="1" latinLnBrk="0" hangingPunct="1">
+              <a:lnSpc>
+                <a:spcPct val="90000"/>
+              </a:lnSpc>
+              <a:spcBef>
+                <a:spcPct val="0"/>
+              </a:spcBef>
+              <a:buNone/>
+              <a:defRPr sz="4000" kern="1200">
+                <a:solidFill>
+                  <a:schemeClr val="tx1"/>
+                </a:solidFill>
+                <a:latin typeface="Georgia" panose="02040502050405020303" pitchFamily="18" charset="0"/>
+                <a:ea typeface="+mj-ea"/>
+                <a:cs typeface="Frank Ruhl Hofshi" panose="00000500000000000000" pitchFamily="50" charset="-79"/>
+              </a:defRPr>
+            </a:lvl1pPr>
+          </a:lstStyle>
+          <a:p>
+            <a:r>
+              <a:rPr lang="fr-FR" sz="3600" dirty="0">
+                <a:latin typeface="Bahnschrift SemiLight" panose="020B0502040204020203" pitchFamily="34" charset="0"/>
+                <a:ea typeface="+mn-ea"/>
+              </a:rPr>
+              <a:t>Réussite en 1A en fonction du rang au concours</a:t>
+            </a:r>
+          </a:p>
+        </p:txBody>
+      </p:sp>
+    </p:spTree>
+    <p:extLst>
+      <p:ext uri="{BB962C8B-B14F-4D97-AF65-F5344CB8AC3E}">
+        <p14:creationId xmlns:p14="http://schemas.microsoft.com/office/powerpoint/2010/main" val="3606319432"/>
+      </p:ext>
+    </p:extLst>
+  </p:cSld>
+  <p:clrMapOvr>
+    <a:masterClrMapping/>
+  </p:clrMapOvr>
+</p:sld>
+</file>
+
+<file path=ppt/slides/slide18.xml><?xml version="1.0" encoding="utf-8"?>
+<p:sld xmlns:a="http://schemas.openxmlformats.org/drawingml/2006/main" xmlns:r="http://schemas.openxmlformats.org/officeDocument/2006/relationships" xmlns:p="http://schemas.openxmlformats.org/presentationml/2006/main">
+  <p:cSld>
+    <p:spTree>
+      <p:nvGrpSpPr>
+        <p:cNvPr id="1" name=""/>
+        <p:cNvGrpSpPr/>
+        <p:nvPr/>
+      </p:nvGrpSpPr>
+      <p:grpSpPr>
+        <a:xfrm>
+          <a:off x="0" y="0"/>
+          <a:ext cx="0" cy="0"/>
+          <a:chOff x="0" y="0"/>
+          <a:chExt cx="0" cy="0"/>
+        </a:xfrm>
+      </p:grpSpPr>
+      <p:pic>
+        <p:nvPicPr>
+          <p:cNvPr id="5" name="Image 4">
+            <a:extLst>
+              <a:ext uri="{FF2B5EF4-FFF2-40B4-BE49-F238E27FC236}">
+                <a16:creationId xmlns:a16="http://schemas.microsoft.com/office/drawing/2014/main" id="{15A8EEDF-76D8-68CE-BCC7-78A139151EAC}"/>
+              </a:ext>
+            </a:extLst>
+          </p:cNvPr>
+          <p:cNvPicPr>
+            <a:picLocks noChangeAspect="1"/>
+          </p:cNvPicPr>
+          <p:nvPr/>
+        </p:nvPicPr>
+        <p:blipFill>
+          <a:blip r:embed="rId2"/>
+          <a:stretch>
+            <a:fillRect/>
+          </a:stretch>
+        </p:blipFill>
+        <p:spPr>
+          <a:xfrm>
+            <a:off x="1710820" y="1612178"/>
+            <a:ext cx="8278380" cy="5087060"/>
+          </a:xfrm>
+          <a:prstGeom prst="rect">
+            <a:avLst/>
+          </a:prstGeom>
+        </p:spPr>
+      </p:pic>
+      <p:sp>
+        <p:nvSpPr>
+          <p:cNvPr id="9" name="Titre 8">
+            <a:extLst>
+              <a:ext uri="{FF2B5EF4-FFF2-40B4-BE49-F238E27FC236}">
+                <a16:creationId xmlns:a16="http://schemas.microsoft.com/office/drawing/2014/main" id="{26FEB75D-F224-A7F0-BD27-8A07F8F82DA9}"/>
+              </a:ext>
+            </a:extLst>
+          </p:cNvPr>
+          <p:cNvSpPr>
+            <a:spLocks noGrp="1"/>
+          </p:cNvSpPr>
+          <p:nvPr>
+            <p:ph type="title"/>
+          </p:nvPr>
+        </p:nvSpPr>
+        <p:spPr/>
+        <p:txBody>
+          <a:bodyPr/>
+          <a:lstStyle/>
+          <a:p>
+            <a:endParaRPr lang="fr-FR"/>
+          </a:p>
+        </p:txBody>
+      </p:sp>
+      <p:sp>
+        <p:nvSpPr>
+          <p:cNvPr id="11" name="Titre 1">
+            <a:extLst>
+              <a:ext uri="{FF2B5EF4-FFF2-40B4-BE49-F238E27FC236}">
+                <a16:creationId xmlns:a16="http://schemas.microsoft.com/office/drawing/2014/main" id="{3FFFF9AE-FF37-66F3-D388-1E4767AE8178}"/>
+              </a:ext>
+            </a:extLst>
+          </p:cNvPr>
+          <p:cNvSpPr txBox="1">
+            <a:spLocks/>
+          </p:cNvSpPr>
+          <p:nvPr/>
+        </p:nvSpPr>
+        <p:spPr>
+          <a:xfrm>
+            <a:off x="990600" y="517525"/>
+            <a:ext cx="10515600" cy="1325563"/>
+          </a:xfrm>
+          <a:prstGeom prst="rect">
+            <a:avLst/>
+          </a:prstGeom>
+        </p:spPr>
+        <p:txBody>
+          <a:bodyPr/>
+          <a:lstStyle>
+            <a:lvl1pPr algn="l" defTabSz="914400" rtl="0" eaLnBrk="1" latinLnBrk="0" hangingPunct="1">
+              <a:lnSpc>
+                <a:spcPct val="90000"/>
+              </a:lnSpc>
+              <a:spcBef>
+                <a:spcPct val="0"/>
+              </a:spcBef>
+              <a:buNone/>
+              <a:defRPr sz="4000" kern="1200">
+                <a:solidFill>
+                  <a:schemeClr val="tx1"/>
+                </a:solidFill>
+                <a:latin typeface="Georgia" panose="02040502050405020303" pitchFamily="18" charset="0"/>
+                <a:ea typeface="+mj-ea"/>
+                <a:cs typeface="Frank Ruhl Hofshi" panose="00000500000000000000" pitchFamily="50" charset="-79"/>
+              </a:defRPr>
+            </a:lvl1pPr>
+          </a:lstStyle>
+          <a:p>
+            <a:r>
+              <a:rPr lang="fr-FR" sz="3600" dirty="0">
+                <a:latin typeface="Bahnschrift SemiLight" panose="020B0502040204020203" pitchFamily="34" charset="0"/>
+                <a:ea typeface="+mn-ea"/>
+              </a:rPr>
+              <a:t>Réussite en 1A en fonction du rang au concours</a:t>
+            </a:r>
+          </a:p>
+          <a:p>
+            <a:r>
+              <a:rPr lang="fr-FR" sz="2000" dirty="0">
+                <a:latin typeface="Bahnschrift SemiLight" panose="020B0502040204020203" pitchFamily="34" charset="0"/>
+                <a:ea typeface="+mn-ea"/>
+              </a:rPr>
+              <a:t>Régression linéaire</a:t>
+            </a:r>
+          </a:p>
+        </p:txBody>
+      </p:sp>
+    </p:spTree>
+    <p:extLst>
+      <p:ext uri="{BB962C8B-B14F-4D97-AF65-F5344CB8AC3E}">
+        <p14:creationId xmlns:p14="http://schemas.microsoft.com/office/powerpoint/2010/main" val="1850807788"/>
+      </p:ext>
+    </p:extLst>
+  </p:cSld>
+  <p:clrMapOvr>
+    <a:masterClrMapping/>
+  </p:clrMapOvr>
+</p:sld>
+</file>
+
+<file path=ppt/slides/slide19.xml><?xml version="1.0" encoding="utf-8"?>
+<p:sld xmlns:a="http://schemas.openxmlformats.org/drawingml/2006/main" xmlns:r="http://schemas.openxmlformats.org/officeDocument/2006/relationships" xmlns:p="http://schemas.openxmlformats.org/presentationml/2006/main">
+  <p:cSld>
+    <p:spTree>
+      <p:nvGrpSpPr>
+        <p:cNvPr id="1" name=""/>
+        <p:cNvGrpSpPr/>
+        <p:nvPr/>
+      </p:nvGrpSpPr>
+      <p:grpSpPr>
+        <a:xfrm>
+          <a:off x="0" y="0"/>
+          <a:ext cx="0" cy="0"/>
+          <a:chOff x="0" y="0"/>
+          <a:chExt cx="0" cy="0"/>
+        </a:xfrm>
+      </p:grpSpPr>
+      <p:sp>
+        <p:nvSpPr>
+          <p:cNvPr id="3" name="Espace réservé du texte 2">
+            <a:extLst>
+              <a:ext uri="{FF2B5EF4-FFF2-40B4-BE49-F238E27FC236}">
+                <a16:creationId xmlns:a16="http://schemas.microsoft.com/office/drawing/2014/main" id="{FB69D952-7CDD-5785-D469-835DFB9C108A}"/>
+              </a:ext>
+            </a:extLst>
+          </p:cNvPr>
+          <p:cNvSpPr>
+            <a:spLocks noGrp="1"/>
+          </p:cNvSpPr>
+          <p:nvPr>
+            <p:ph type="body" sz="quarter" idx="10"/>
+          </p:nvPr>
+        </p:nvSpPr>
+        <p:spPr>
+          <a:xfrm>
+            <a:off x="685800" y="1423598"/>
+            <a:ext cx="10515600" cy="3886200"/>
+          </a:xfrm>
+        </p:spPr>
+        <p:txBody>
+          <a:bodyPr/>
+          <a:lstStyle/>
+          <a:p>
+            <a:pPr marL="285750" indent="-285750">
+              <a:buFont typeface="Arial" panose="020B0604020202020204" pitchFamily="34" charset="0"/>
+              <a:buChar char="•"/>
+            </a:pPr>
+            <a:r>
+              <a:rPr lang="fr-FR" sz="1600" dirty="0"/>
+              <a:t>Très faible qualité d’ajustement des modèles de régression (R2 = 0,05)</a:t>
+            </a:r>
+          </a:p>
+          <a:p>
+            <a:pPr marL="285750" indent="-285750">
+              <a:buFont typeface="Arial" panose="020B0604020202020204" pitchFamily="34" charset="0"/>
+              <a:buChar char="•"/>
+            </a:pPr>
+            <a:r>
+              <a:rPr lang="fr-FR" sz="1600" dirty="0"/>
+              <a:t>Pour autant, quel que soit les périodes, le lien est toujours significatif avec une pente très faible de l'ordre de 0,03 entre le rang en première année (ou la moyenne générale) et le rang d'admission au concours (MP, PC, PSI, BL, D2).</a:t>
+            </a:r>
+          </a:p>
+          <a:p>
+            <a:pPr marL="285750" indent="-285750">
+              <a:buFont typeface="Arial" panose="020B0604020202020204" pitchFamily="34" charset="0"/>
+              <a:buChar char="•"/>
+            </a:pPr>
+            <a:r>
+              <a:rPr lang="fr-FR" sz="1600" dirty="0"/>
+              <a:t>En revanche, le lien entre la réussite en 2A et la réussite en 1A est très net (R2 &gt; 0,5).</a:t>
+            </a:r>
+          </a:p>
+          <a:p>
+            <a:r>
+              <a:rPr lang="fr-FR" sz="1600" dirty="0">
+                <a:sym typeface="Wingdings" panose="05000000000000000000" pitchFamily="2" charset="2"/>
+              </a:rPr>
+              <a:t> </a:t>
+            </a:r>
+            <a:r>
+              <a:rPr lang="fr-FR" sz="1600" dirty="0"/>
+              <a:t>Parmi les hypothèses qui pourraient expliquer l'absence de lien entre la réussite à l'ENSAI et le rang au concours :</a:t>
+            </a:r>
+          </a:p>
+          <a:p>
+            <a:pPr marL="285750" indent="-285750">
+              <a:buFontTx/>
+              <a:buChar char="-"/>
+            </a:pPr>
+            <a:r>
+              <a:rPr lang="fr-FR" sz="1600" dirty="0"/>
+              <a:t>L'essentiel des promotions étant constitués de MP classés via un concours commun (CCINP), l'écart entre le meilleur admis et le moins bon admis n'est peut-être pas énorme</a:t>
+            </a:r>
+          </a:p>
+          <a:p>
+            <a:pPr marL="285750" indent="-285750">
+              <a:buFontTx/>
+              <a:buChar char="-"/>
+            </a:pPr>
+            <a:r>
+              <a:rPr lang="fr-FR" sz="1600" dirty="0"/>
+              <a:t>Et peut-être que cet écart ne se fait pas sur des matières qui procurent un avantage comparatif à l'ENSAI (les différences peuvent se faire sur des matières comme la culture générale, la physique, etc.)</a:t>
+            </a:r>
+          </a:p>
+          <a:p>
+            <a:r>
+              <a:rPr lang="fr-FR" sz="1600" i="1" dirty="0">
+                <a:sym typeface="Wingdings" panose="05000000000000000000" pitchFamily="2" charset="2"/>
+              </a:rPr>
+              <a:t> </a:t>
+            </a:r>
+            <a:r>
+              <a:rPr lang="fr-FR" sz="1600" i="1" dirty="0"/>
+              <a:t>Ces éléments militent pour disposer des notes aux différentes épreuves des concours si on veut affiner l'analyse</a:t>
+            </a:r>
+          </a:p>
+          <a:p>
+            <a:pPr marL="285750" indent="-285750">
+              <a:buFontTx/>
+              <a:buChar char="-"/>
+            </a:pPr>
+            <a:r>
+              <a:rPr lang="fr-FR" sz="1600" dirty="0"/>
+              <a:t>Une autre hypothèse qui n'exclue pas les deux premières est celle d'un relâchement post CPGE pour certains étudiants, et inversement de comportements plus studieux pour les élèves issus d'autres voies (BUT/Interne par exemple)</a:t>
+            </a:r>
+          </a:p>
+          <a:p>
+            <a:r>
+              <a:rPr lang="fr-FR" sz="1600" dirty="0">
+                <a:sym typeface="Wingdings" panose="05000000000000000000" pitchFamily="2" charset="2"/>
+              </a:rPr>
+              <a:t></a:t>
+            </a:r>
+            <a:r>
+              <a:rPr lang="fr-FR" sz="1600" dirty="0"/>
+              <a:t>Cela militerait pour un discours adapté à l'entrée pour prendre en compte cette dimension et limiter les comportements de « touristes »  On s'intéressera aux profils de ces élèves pour comprendre un peu mieux la trajectoire depuis la réussite au concours jusqu'à l'obtention du master et de sa spécialité.</a:t>
+            </a:r>
+          </a:p>
+        </p:txBody>
+      </p:sp>
+      <p:sp>
+        <p:nvSpPr>
+          <p:cNvPr id="4" name="Titre 1">
+            <a:extLst>
+              <a:ext uri="{FF2B5EF4-FFF2-40B4-BE49-F238E27FC236}">
+                <a16:creationId xmlns:a16="http://schemas.microsoft.com/office/drawing/2014/main" id="{981DE5A5-CD05-13BB-F373-8CB359956D9E}"/>
+              </a:ext>
+            </a:extLst>
+          </p:cNvPr>
+          <p:cNvSpPr txBox="1">
+            <a:spLocks/>
+          </p:cNvSpPr>
+          <p:nvPr/>
+        </p:nvSpPr>
+        <p:spPr>
+          <a:xfrm>
+            <a:off x="990600" y="517525"/>
+            <a:ext cx="10515600" cy="1325563"/>
+          </a:xfrm>
+          <a:prstGeom prst="rect">
+            <a:avLst/>
+          </a:prstGeom>
+        </p:spPr>
+        <p:txBody>
+          <a:bodyPr/>
+          <a:lstStyle>
+            <a:lvl1pPr algn="l" defTabSz="914400" rtl="0" eaLnBrk="1" latinLnBrk="0" hangingPunct="1">
+              <a:lnSpc>
+                <a:spcPct val="90000"/>
+              </a:lnSpc>
+              <a:spcBef>
+                <a:spcPct val="0"/>
+              </a:spcBef>
+              <a:buNone/>
+              <a:defRPr sz="4000" kern="1200">
+                <a:solidFill>
+                  <a:schemeClr val="tx1"/>
+                </a:solidFill>
+                <a:latin typeface="Georgia" panose="02040502050405020303" pitchFamily="18" charset="0"/>
+                <a:ea typeface="+mj-ea"/>
+                <a:cs typeface="Frank Ruhl Hofshi" panose="00000500000000000000" pitchFamily="50" charset="-79"/>
+              </a:defRPr>
+            </a:lvl1pPr>
+          </a:lstStyle>
+          <a:p>
+            <a:r>
+              <a:rPr lang="fr-FR" sz="3600" dirty="0">
+                <a:latin typeface="Bahnschrift SemiLight" panose="020B0502040204020203" pitchFamily="34" charset="0"/>
+                <a:ea typeface="+mn-ea"/>
+              </a:rPr>
+              <a:t>Réussite en 1A en fonction du rang au concours</a:t>
+            </a:r>
+          </a:p>
+          <a:p>
+            <a:r>
+              <a:rPr lang="fr-FR" sz="2000" dirty="0">
+                <a:latin typeface="Bahnschrift SemiLight" panose="020B0502040204020203" pitchFamily="34" charset="0"/>
+                <a:ea typeface="+mn-ea"/>
+              </a:rPr>
+              <a:t>Régression linéaire</a:t>
+            </a:r>
+          </a:p>
+        </p:txBody>
+      </p:sp>
+    </p:spTree>
+    <p:extLst>
+      <p:ext uri="{BB962C8B-B14F-4D97-AF65-F5344CB8AC3E}">
+        <p14:creationId xmlns:p14="http://schemas.microsoft.com/office/powerpoint/2010/main" val="1302684795"/>
+      </p:ext>
+    </p:extLst>
+  </p:cSld>
+  <p:clrMapOvr>
+    <a:masterClrMapping/>
+  </p:clrMapOvr>
+</p:sld>
+</file>
+
 <file path=ppt/slides/slide2.xml><?xml version="1.0" encoding="utf-8"?>
 <p:sld xmlns:a="http://schemas.openxmlformats.org/drawingml/2006/main" xmlns:r="http://schemas.openxmlformats.org/officeDocument/2006/relationships" xmlns:p="http://schemas.openxmlformats.org/presentationml/2006/main">
   <p:cSld>
@@ -10870,6 +11366,1410 @@
 </p:sld>
 </file>
 
+<file path=ppt/slides/slide20.xml><?xml version="1.0" encoding="utf-8"?>
+<p:sld xmlns:a="http://schemas.openxmlformats.org/drawingml/2006/main" xmlns:r="http://schemas.openxmlformats.org/officeDocument/2006/relationships" xmlns:p="http://schemas.openxmlformats.org/presentationml/2006/main">
+  <p:cSld>
+    <p:spTree>
+      <p:nvGrpSpPr>
+        <p:cNvPr id="1" name=""/>
+        <p:cNvGrpSpPr/>
+        <p:nvPr/>
+      </p:nvGrpSpPr>
+      <p:grpSpPr>
+        <a:xfrm>
+          <a:off x="0" y="0"/>
+          <a:ext cx="0" cy="0"/>
+          <a:chOff x="0" y="0"/>
+          <a:chExt cx="0" cy="0"/>
+        </a:xfrm>
+      </p:grpSpPr>
+      <p:sp>
+        <p:nvSpPr>
+          <p:cNvPr id="3" name="Espace réservé du texte 2">
+            <a:extLst>
+              <a:ext uri="{FF2B5EF4-FFF2-40B4-BE49-F238E27FC236}">
+                <a16:creationId xmlns:a16="http://schemas.microsoft.com/office/drawing/2014/main" id="{5424FCDE-6101-6570-E3A6-DF98F018B8C2}"/>
+              </a:ext>
+            </a:extLst>
+          </p:cNvPr>
+          <p:cNvSpPr>
+            <a:spLocks noGrp="1"/>
+          </p:cNvSpPr>
+          <p:nvPr>
+            <p:ph type="body" sz="quarter" idx="10"/>
+          </p:nvPr>
+        </p:nvSpPr>
+        <p:spPr/>
+        <p:txBody>
+          <a:bodyPr/>
+          <a:lstStyle/>
+          <a:p>
+            <a:pPr marL="457200" indent="-457200">
+              <a:buFont typeface="Arial" panose="020B0604020202020204" pitchFamily="34" charset="0"/>
+              <a:buChar char="•"/>
+            </a:pPr>
+            <a:r>
+              <a:rPr lang="fr-FR" dirty="0"/>
+              <a:t>On classe en quatre catégorie : "Très bon", "Bon", "Moyen", "Moins bon"</a:t>
+            </a:r>
+          </a:p>
+          <a:p>
+            <a:pPr marL="457200" indent="-457200">
+              <a:buFont typeface="Arial" panose="020B0604020202020204" pitchFamily="34" charset="0"/>
+              <a:buChar char="•"/>
+            </a:pPr>
+            <a:r>
+              <a:rPr lang="fr-FR" dirty="0"/>
+              <a:t>L'hypothèse nulle ("tous les profil_1A ont le même rang moyen au concours est rejetée), la probabilité d'observer une telle différence par hasard est de 0,003%.En revanche, η² = 0.027 : 2,7% de la variance du </a:t>
+            </a:r>
+            <a:r>
+              <a:rPr lang="fr-FR" dirty="0" err="1"/>
+              <a:t>rang_cc</a:t>
+            </a:r>
+            <a:r>
+              <a:rPr lang="fr-FR" dirty="0"/>
+              <a:t> est expliquée par le profil_1A. </a:t>
+            </a:r>
+          </a:p>
+          <a:p>
+            <a:r>
+              <a:rPr lang="fr-FR" dirty="0"/>
+              <a:t>→ Effet très faible</a:t>
+            </a:r>
+          </a:p>
+        </p:txBody>
+      </p:sp>
+      <p:sp>
+        <p:nvSpPr>
+          <p:cNvPr id="7" name="Titre 1">
+            <a:extLst>
+              <a:ext uri="{FF2B5EF4-FFF2-40B4-BE49-F238E27FC236}">
+                <a16:creationId xmlns:a16="http://schemas.microsoft.com/office/drawing/2014/main" id="{25CD4711-E92B-5137-EE17-BEBE70BF3C73}"/>
+              </a:ext>
+            </a:extLst>
+          </p:cNvPr>
+          <p:cNvSpPr txBox="1">
+            <a:spLocks/>
+          </p:cNvSpPr>
+          <p:nvPr/>
+        </p:nvSpPr>
+        <p:spPr>
+          <a:xfrm>
+            <a:off x="990600" y="517525"/>
+            <a:ext cx="10515600" cy="1325563"/>
+          </a:xfrm>
+          <a:prstGeom prst="rect">
+            <a:avLst/>
+          </a:prstGeom>
+        </p:spPr>
+        <p:txBody>
+          <a:bodyPr/>
+          <a:lstStyle>
+            <a:lvl1pPr algn="l" defTabSz="914400" rtl="0" eaLnBrk="1" latinLnBrk="0" hangingPunct="1">
+              <a:lnSpc>
+                <a:spcPct val="90000"/>
+              </a:lnSpc>
+              <a:spcBef>
+                <a:spcPct val="0"/>
+              </a:spcBef>
+              <a:buNone/>
+              <a:defRPr sz="4000" kern="1200">
+                <a:solidFill>
+                  <a:schemeClr val="tx1"/>
+                </a:solidFill>
+                <a:latin typeface="Georgia" panose="02040502050405020303" pitchFamily="18" charset="0"/>
+                <a:ea typeface="+mj-ea"/>
+                <a:cs typeface="Frank Ruhl Hofshi" panose="00000500000000000000" pitchFamily="50" charset="-79"/>
+              </a:defRPr>
+            </a:lvl1pPr>
+          </a:lstStyle>
+          <a:p>
+            <a:r>
+              <a:rPr lang="fr-FR" sz="3600" dirty="0">
+                <a:latin typeface="Bahnschrift SemiLight" panose="020B0502040204020203" pitchFamily="34" charset="0"/>
+                <a:ea typeface="+mn-ea"/>
+              </a:rPr>
+              <a:t>Réussite en 1A en fonction du rang au concours</a:t>
+            </a:r>
+          </a:p>
+          <a:p>
+            <a:r>
+              <a:rPr lang="fr-FR" sz="3600" dirty="0">
+                <a:latin typeface="Bahnschrift SemiLight" panose="020B0502040204020203" pitchFamily="34" charset="0"/>
+                <a:ea typeface="+mn-ea"/>
+              </a:rPr>
+              <a:t>Anova</a:t>
+            </a:r>
+          </a:p>
+        </p:txBody>
+      </p:sp>
+    </p:spTree>
+    <p:extLst>
+      <p:ext uri="{BB962C8B-B14F-4D97-AF65-F5344CB8AC3E}">
+        <p14:creationId xmlns:p14="http://schemas.microsoft.com/office/powerpoint/2010/main" val="3725798687"/>
+      </p:ext>
+    </p:extLst>
+  </p:cSld>
+  <p:clrMapOvr>
+    <a:masterClrMapping/>
+  </p:clrMapOvr>
+</p:sld>
+</file>
+
+<file path=ppt/slides/slide21.xml><?xml version="1.0" encoding="utf-8"?>
+<p:sld xmlns:a="http://schemas.openxmlformats.org/drawingml/2006/main" xmlns:r="http://schemas.openxmlformats.org/officeDocument/2006/relationships" xmlns:p="http://schemas.openxmlformats.org/presentationml/2006/main">
+  <p:cSld>
+    <p:spTree>
+      <p:nvGrpSpPr>
+        <p:cNvPr id="1" name=""/>
+        <p:cNvGrpSpPr/>
+        <p:nvPr/>
+      </p:nvGrpSpPr>
+      <p:grpSpPr>
+        <a:xfrm>
+          <a:off x="0" y="0"/>
+          <a:ext cx="0" cy="0"/>
+          <a:chOff x="0" y="0"/>
+          <a:chExt cx="0" cy="0"/>
+        </a:xfrm>
+      </p:grpSpPr>
+      <p:sp>
+        <p:nvSpPr>
+          <p:cNvPr id="3" name="Espace réservé du texte 2">
+            <a:extLst>
+              <a:ext uri="{FF2B5EF4-FFF2-40B4-BE49-F238E27FC236}">
+                <a16:creationId xmlns:a16="http://schemas.microsoft.com/office/drawing/2014/main" id="{298931CA-4479-BD9F-FBF7-C73BC37C43E7}"/>
+              </a:ext>
+            </a:extLst>
+          </p:cNvPr>
+          <p:cNvSpPr>
+            <a:spLocks noGrp="1"/>
+          </p:cNvSpPr>
+          <p:nvPr>
+            <p:ph type="body" sz="quarter" idx="10"/>
+          </p:nvPr>
+        </p:nvSpPr>
+        <p:spPr>
+          <a:xfrm>
+            <a:off x="838200" y="1617361"/>
+            <a:ext cx="10515600" cy="4955967"/>
+          </a:xfrm>
+        </p:spPr>
+        <p:txBody>
+          <a:bodyPr/>
+          <a:lstStyle/>
+          <a:p>
+            <a:r>
+              <a:rPr lang="fr-FR" sz="1400" dirty="0"/>
+              <a:t>L'ANOVA nous permet : </a:t>
+            </a:r>
+          </a:p>
+          <a:p>
+            <a:pPr marL="285750" indent="-285750">
+              <a:buFontTx/>
+              <a:buChar char="-"/>
+            </a:pPr>
+            <a:r>
+              <a:rPr lang="fr-FR" sz="1400" dirty="0"/>
+              <a:t>d'identifier une plus grande disparité dans le groupe des moins bons</a:t>
+            </a:r>
+          </a:p>
+          <a:p>
+            <a:pPr marL="285750" indent="-285750">
+              <a:buFontTx/>
+              <a:buChar char="-"/>
+            </a:pPr>
+            <a:r>
+              <a:rPr lang="fr-FR" sz="1400" dirty="0"/>
+              <a:t>- de visualiser une légère association avec de forts intervalles de confiance</a:t>
+            </a:r>
+          </a:p>
+          <a:p>
+            <a:endParaRPr lang="fr-FR" sz="1400" dirty="0"/>
+          </a:p>
+          <a:p>
+            <a:endParaRPr lang="fr-FR" sz="1400" dirty="0"/>
+          </a:p>
+          <a:p>
+            <a:endParaRPr lang="fr-FR" sz="1400" dirty="0"/>
+          </a:p>
+          <a:p>
+            <a:endParaRPr lang="fr-FR" sz="1400" dirty="0"/>
+          </a:p>
+          <a:p>
+            <a:endParaRPr lang="fr-FR" sz="1400" dirty="0"/>
+          </a:p>
+          <a:p>
+            <a:endParaRPr lang="fr-FR" sz="1400" dirty="0"/>
+          </a:p>
+          <a:p>
+            <a:endParaRPr lang="fr-FR" sz="1400" dirty="0"/>
+          </a:p>
+          <a:p>
+            <a:endParaRPr lang="fr-FR" sz="1400" dirty="0"/>
+          </a:p>
+          <a:p>
+            <a:endParaRPr lang="fr-FR" sz="1400" dirty="0"/>
+          </a:p>
+          <a:p>
+            <a:endParaRPr lang="fr-FR" sz="1400" dirty="0"/>
+          </a:p>
+          <a:p>
+            <a:endParaRPr lang="fr-FR" sz="1400" dirty="0"/>
+          </a:p>
+          <a:p>
+            <a:r>
+              <a:rPr lang="fr-FR" sz="1400" dirty="0"/>
+              <a:t>Le test de Levene vérifie l'homogénéité des variances entre les groupes (ici, les 4 profils : "Très bon", "Bon", "Moyen", "Moins bon").Hypothèse nulle (H₀) : Les variances des groupes sont </a:t>
+            </a:r>
+            <a:r>
+              <a:rPr lang="fr-FR" sz="1400" dirty="0" err="1"/>
+              <a:t>égales.p</a:t>
+            </a:r>
+            <a:r>
+              <a:rPr lang="fr-FR" sz="1400" dirty="0"/>
+              <a:t>-value = 0.029 : → H₀ est rejetée au seuil de 5% (car 0.029 &lt; 0.05). Les variances ne sont pas homogènes entre les profils. Donc même l'</a:t>
+            </a:r>
+            <a:r>
+              <a:rPr lang="fr-FR" sz="1400" dirty="0" err="1"/>
+              <a:t>anova</a:t>
+            </a:r>
+            <a:r>
+              <a:rPr lang="fr-FR" sz="1400" dirty="0"/>
+              <a:t> est peu valide statistiquement.</a:t>
+            </a:r>
+          </a:p>
+        </p:txBody>
+      </p:sp>
+      <p:pic>
+        <p:nvPicPr>
+          <p:cNvPr id="5" name="Image 4">
+            <a:extLst>
+              <a:ext uri="{FF2B5EF4-FFF2-40B4-BE49-F238E27FC236}">
+                <a16:creationId xmlns:a16="http://schemas.microsoft.com/office/drawing/2014/main" id="{A0A98CAF-7DE7-487A-2A15-AA37318A0623}"/>
+              </a:ext>
+            </a:extLst>
+          </p:cNvPr>
+          <p:cNvPicPr>
+            <a:picLocks noChangeAspect="1"/>
+          </p:cNvPicPr>
+          <p:nvPr/>
+        </p:nvPicPr>
+        <p:blipFill>
+          <a:blip r:embed="rId2"/>
+          <a:stretch>
+            <a:fillRect/>
+          </a:stretch>
+        </p:blipFill>
+        <p:spPr>
+          <a:xfrm>
+            <a:off x="3229898" y="2701954"/>
+            <a:ext cx="5507915" cy="3384611"/>
+          </a:xfrm>
+          <a:prstGeom prst="rect">
+            <a:avLst/>
+          </a:prstGeom>
+        </p:spPr>
+      </p:pic>
+      <p:sp>
+        <p:nvSpPr>
+          <p:cNvPr id="10" name="Titre 1">
+            <a:extLst>
+              <a:ext uri="{FF2B5EF4-FFF2-40B4-BE49-F238E27FC236}">
+                <a16:creationId xmlns:a16="http://schemas.microsoft.com/office/drawing/2014/main" id="{16B80C7D-9181-91DB-9677-2343A4038EE3}"/>
+              </a:ext>
+            </a:extLst>
+          </p:cNvPr>
+          <p:cNvSpPr txBox="1">
+            <a:spLocks/>
+          </p:cNvSpPr>
+          <p:nvPr/>
+        </p:nvSpPr>
+        <p:spPr>
+          <a:xfrm>
+            <a:off x="990600" y="517525"/>
+            <a:ext cx="10515600" cy="1325563"/>
+          </a:xfrm>
+          <a:prstGeom prst="rect">
+            <a:avLst/>
+          </a:prstGeom>
+        </p:spPr>
+        <p:txBody>
+          <a:bodyPr/>
+          <a:lstStyle>
+            <a:lvl1pPr algn="l" defTabSz="914400" rtl="0" eaLnBrk="1" latinLnBrk="0" hangingPunct="1">
+              <a:lnSpc>
+                <a:spcPct val="90000"/>
+              </a:lnSpc>
+              <a:spcBef>
+                <a:spcPct val="0"/>
+              </a:spcBef>
+              <a:buNone/>
+              <a:defRPr sz="4000" kern="1200">
+                <a:solidFill>
+                  <a:schemeClr val="tx1"/>
+                </a:solidFill>
+                <a:latin typeface="Georgia" panose="02040502050405020303" pitchFamily="18" charset="0"/>
+                <a:ea typeface="+mj-ea"/>
+                <a:cs typeface="Frank Ruhl Hofshi" panose="00000500000000000000" pitchFamily="50" charset="-79"/>
+              </a:defRPr>
+            </a:lvl1pPr>
+          </a:lstStyle>
+          <a:p>
+            <a:r>
+              <a:rPr lang="fr-FR" sz="3600" dirty="0">
+                <a:latin typeface="Bahnschrift SemiLight" panose="020B0502040204020203" pitchFamily="34" charset="0"/>
+                <a:ea typeface="+mn-ea"/>
+              </a:rPr>
+              <a:t>Réussite en 1A en fonction du rang au concours</a:t>
+            </a:r>
+          </a:p>
+          <a:p>
+            <a:r>
+              <a:rPr lang="fr-FR" sz="3600" dirty="0">
+                <a:latin typeface="Bahnschrift SemiLight" panose="020B0502040204020203" pitchFamily="34" charset="0"/>
+                <a:ea typeface="+mn-ea"/>
+              </a:rPr>
+              <a:t>Anova</a:t>
+            </a:r>
+          </a:p>
+        </p:txBody>
+      </p:sp>
+    </p:spTree>
+    <p:extLst>
+      <p:ext uri="{BB962C8B-B14F-4D97-AF65-F5344CB8AC3E}">
+        <p14:creationId xmlns:p14="http://schemas.microsoft.com/office/powerpoint/2010/main" val="620233827"/>
+      </p:ext>
+    </p:extLst>
+  </p:cSld>
+  <p:clrMapOvr>
+    <a:masterClrMapping/>
+  </p:clrMapOvr>
+</p:sld>
+</file>
+
+<file path=ppt/slides/slide22.xml><?xml version="1.0" encoding="utf-8"?>
+<p:sld xmlns:a="http://schemas.openxmlformats.org/drawingml/2006/main" xmlns:r="http://schemas.openxmlformats.org/officeDocument/2006/relationships" xmlns:p="http://schemas.openxmlformats.org/presentationml/2006/main">
+  <p:cSld>
+    <p:spTree>
+      <p:nvGrpSpPr>
+        <p:cNvPr id="1" name=""/>
+        <p:cNvGrpSpPr/>
+        <p:nvPr/>
+      </p:nvGrpSpPr>
+      <p:grpSpPr>
+        <a:xfrm>
+          <a:off x="0" y="0"/>
+          <a:ext cx="0" cy="0"/>
+          <a:chOff x="0" y="0"/>
+          <a:chExt cx="0" cy="0"/>
+        </a:xfrm>
+      </p:grpSpPr>
+      <p:pic>
+        <p:nvPicPr>
+          <p:cNvPr id="5" name="Image 4">
+            <a:extLst>
+              <a:ext uri="{FF2B5EF4-FFF2-40B4-BE49-F238E27FC236}">
+                <a16:creationId xmlns:a16="http://schemas.microsoft.com/office/drawing/2014/main" id="{609B629E-E9D0-79C7-3EE4-2A6065F64375}"/>
+              </a:ext>
+            </a:extLst>
+          </p:cNvPr>
+          <p:cNvPicPr>
+            <a:picLocks noChangeAspect="1"/>
+          </p:cNvPicPr>
+          <p:nvPr/>
+        </p:nvPicPr>
+        <p:blipFill>
+          <a:blip r:embed="rId2"/>
+          <a:stretch>
+            <a:fillRect/>
+          </a:stretch>
+        </p:blipFill>
+        <p:spPr>
+          <a:xfrm>
+            <a:off x="1720106" y="1357224"/>
+            <a:ext cx="8055016" cy="4983251"/>
+          </a:xfrm>
+          <a:prstGeom prst="rect">
+            <a:avLst/>
+          </a:prstGeom>
+        </p:spPr>
+      </p:pic>
+      <p:sp>
+        <p:nvSpPr>
+          <p:cNvPr id="7" name="Titre 1">
+            <a:extLst>
+              <a:ext uri="{FF2B5EF4-FFF2-40B4-BE49-F238E27FC236}">
+                <a16:creationId xmlns:a16="http://schemas.microsoft.com/office/drawing/2014/main" id="{D3259385-527B-E4B4-5124-C160C8C833DE}"/>
+              </a:ext>
+            </a:extLst>
+          </p:cNvPr>
+          <p:cNvSpPr txBox="1">
+            <a:spLocks/>
+          </p:cNvSpPr>
+          <p:nvPr/>
+        </p:nvSpPr>
+        <p:spPr>
+          <a:xfrm>
+            <a:off x="990600" y="517525"/>
+            <a:ext cx="10515600" cy="1325563"/>
+          </a:xfrm>
+          <a:prstGeom prst="rect">
+            <a:avLst/>
+          </a:prstGeom>
+        </p:spPr>
+        <p:txBody>
+          <a:bodyPr/>
+          <a:lstStyle>
+            <a:lvl1pPr algn="l" defTabSz="914400" rtl="0" eaLnBrk="1" latinLnBrk="0" hangingPunct="1">
+              <a:lnSpc>
+                <a:spcPct val="90000"/>
+              </a:lnSpc>
+              <a:spcBef>
+                <a:spcPct val="0"/>
+              </a:spcBef>
+              <a:buNone/>
+              <a:defRPr sz="4000" kern="1200">
+                <a:solidFill>
+                  <a:schemeClr val="tx1"/>
+                </a:solidFill>
+                <a:latin typeface="Georgia" panose="02040502050405020303" pitchFamily="18" charset="0"/>
+                <a:ea typeface="+mj-ea"/>
+                <a:cs typeface="Frank Ruhl Hofshi" panose="00000500000000000000" pitchFamily="50" charset="-79"/>
+              </a:defRPr>
+            </a:lvl1pPr>
+          </a:lstStyle>
+          <a:p>
+            <a:r>
+              <a:rPr lang="fr-FR" sz="3600" dirty="0">
+                <a:latin typeface="Bahnschrift SemiLight" panose="020B0502040204020203" pitchFamily="34" charset="0"/>
+                <a:ea typeface="+mn-ea"/>
+              </a:rPr>
+              <a:t>Voie d’admission et profil académique</a:t>
+            </a:r>
+          </a:p>
+        </p:txBody>
+      </p:sp>
+    </p:spTree>
+    <p:extLst>
+      <p:ext uri="{BB962C8B-B14F-4D97-AF65-F5344CB8AC3E}">
+        <p14:creationId xmlns:p14="http://schemas.microsoft.com/office/powerpoint/2010/main" val="1264691345"/>
+      </p:ext>
+    </p:extLst>
+  </p:cSld>
+  <p:clrMapOvr>
+    <a:masterClrMapping/>
+  </p:clrMapOvr>
+</p:sld>
+</file>
+
+<file path=ppt/slides/slide23.xml><?xml version="1.0" encoding="utf-8"?>
+<p:sld xmlns:a="http://schemas.openxmlformats.org/drawingml/2006/main" xmlns:r="http://schemas.openxmlformats.org/officeDocument/2006/relationships" xmlns:p="http://schemas.openxmlformats.org/presentationml/2006/main">
+  <p:cSld>
+    <p:spTree>
+      <p:nvGrpSpPr>
+        <p:cNvPr id="1" name=""/>
+        <p:cNvGrpSpPr/>
+        <p:nvPr/>
+      </p:nvGrpSpPr>
+      <p:grpSpPr>
+        <a:xfrm>
+          <a:off x="0" y="0"/>
+          <a:ext cx="0" cy="0"/>
+          <a:chOff x="0" y="0"/>
+          <a:chExt cx="0" cy="0"/>
+        </a:xfrm>
+      </p:grpSpPr>
+      <p:pic>
+        <p:nvPicPr>
+          <p:cNvPr id="5" name="Image 4">
+            <a:extLst>
+              <a:ext uri="{FF2B5EF4-FFF2-40B4-BE49-F238E27FC236}">
+                <a16:creationId xmlns:a16="http://schemas.microsoft.com/office/drawing/2014/main" id="{BEBD3F9F-58AE-6785-8273-1393D13C7F27}"/>
+              </a:ext>
+            </a:extLst>
+          </p:cNvPr>
+          <p:cNvPicPr>
+            <a:picLocks noChangeAspect="1"/>
+          </p:cNvPicPr>
+          <p:nvPr/>
+        </p:nvPicPr>
+        <p:blipFill>
+          <a:blip r:embed="rId2"/>
+          <a:stretch>
+            <a:fillRect/>
+          </a:stretch>
+        </p:blipFill>
+        <p:spPr>
+          <a:xfrm>
+            <a:off x="1841108" y="1027906"/>
+            <a:ext cx="8240275" cy="5077534"/>
+          </a:xfrm>
+          <a:prstGeom prst="rect">
+            <a:avLst/>
+          </a:prstGeom>
+        </p:spPr>
+      </p:pic>
+      <p:sp>
+        <p:nvSpPr>
+          <p:cNvPr id="7" name="Titre 1">
+            <a:extLst>
+              <a:ext uri="{FF2B5EF4-FFF2-40B4-BE49-F238E27FC236}">
+                <a16:creationId xmlns:a16="http://schemas.microsoft.com/office/drawing/2014/main" id="{2375169E-CACC-8A67-D536-A33EB9CAFC1D}"/>
+              </a:ext>
+            </a:extLst>
+          </p:cNvPr>
+          <p:cNvSpPr txBox="1">
+            <a:spLocks/>
+          </p:cNvSpPr>
+          <p:nvPr/>
+        </p:nvSpPr>
+        <p:spPr>
+          <a:xfrm>
+            <a:off x="990600" y="517525"/>
+            <a:ext cx="10515600" cy="1325563"/>
+          </a:xfrm>
+          <a:prstGeom prst="rect">
+            <a:avLst/>
+          </a:prstGeom>
+        </p:spPr>
+        <p:txBody>
+          <a:bodyPr/>
+          <a:lstStyle>
+            <a:lvl1pPr algn="l" defTabSz="914400" rtl="0" eaLnBrk="1" latinLnBrk="0" hangingPunct="1">
+              <a:lnSpc>
+                <a:spcPct val="90000"/>
+              </a:lnSpc>
+              <a:spcBef>
+                <a:spcPct val="0"/>
+              </a:spcBef>
+              <a:buNone/>
+              <a:defRPr sz="4000" kern="1200">
+                <a:solidFill>
+                  <a:schemeClr val="tx1"/>
+                </a:solidFill>
+                <a:latin typeface="Georgia" panose="02040502050405020303" pitchFamily="18" charset="0"/>
+                <a:ea typeface="+mj-ea"/>
+                <a:cs typeface="Frank Ruhl Hofshi" panose="00000500000000000000" pitchFamily="50" charset="-79"/>
+              </a:defRPr>
+            </a:lvl1pPr>
+          </a:lstStyle>
+          <a:p>
+            <a:r>
+              <a:rPr lang="fr-FR" sz="3600" dirty="0">
+                <a:latin typeface="Bahnschrift SemiLight" panose="020B0502040204020203" pitchFamily="34" charset="0"/>
+                <a:ea typeface="+mn-ea"/>
+              </a:rPr>
+              <a:t>Voie d’admission et profil académique</a:t>
+            </a:r>
+          </a:p>
+        </p:txBody>
+      </p:sp>
+    </p:spTree>
+    <p:extLst>
+      <p:ext uri="{BB962C8B-B14F-4D97-AF65-F5344CB8AC3E}">
+        <p14:creationId xmlns:p14="http://schemas.microsoft.com/office/powerpoint/2010/main" val="1827044926"/>
+      </p:ext>
+    </p:extLst>
+  </p:cSld>
+  <p:clrMapOvr>
+    <a:masterClrMapping/>
+  </p:clrMapOvr>
+</p:sld>
+</file>
+
+<file path=ppt/slides/slide24.xml><?xml version="1.0" encoding="utf-8"?>
+<p:sld xmlns:a="http://schemas.openxmlformats.org/drawingml/2006/main" xmlns:r="http://schemas.openxmlformats.org/officeDocument/2006/relationships" xmlns:p="http://schemas.openxmlformats.org/presentationml/2006/main">
+  <p:cSld>
+    <p:spTree>
+      <p:nvGrpSpPr>
+        <p:cNvPr id="1" name="">
+          <a:extLst>
+            <a:ext uri="{FF2B5EF4-FFF2-40B4-BE49-F238E27FC236}">
+              <a16:creationId xmlns:a16="http://schemas.microsoft.com/office/drawing/2014/main" id="{D6690215-25F6-70BF-2CB7-A957858FC3C6}"/>
+            </a:ext>
+          </a:extLst>
+        </p:cNvPr>
+        <p:cNvGrpSpPr/>
+        <p:nvPr/>
+      </p:nvGrpSpPr>
+      <p:grpSpPr>
+        <a:xfrm>
+          <a:off x="0" y="0"/>
+          <a:ext cx="0" cy="0"/>
+          <a:chOff x="0" y="0"/>
+          <a:chExt cx="0" cy="0"/>
+        </a:xfrm>
+      </p:grpSpPr>
+      <p:pic>
+        <p:nvPicPr>
+          <p:cNvPr id="3" name="Image 2">
+            <a:extLst>
+              <a:ext uri="{FF2B5EF4-FFF2-40B4-BE49-F238E27FC236}">
+                <a16:creationId xmlns:a16="http://schemas.microsoft.com/office/drawing/2014/main" id="{F5094517-52A7-A624-4B96-0F7D76A0DE7B}"/>
+              </a:ext>
+            </a:extLst>
+          </p:cNvPr>
+          <p:cNvPicPr>
+            <a:picLocks noChangeAspect="1"/>
+          </p:cNvPicPr>
+          <p:nvPr/>
+        </p:nvPicPr>
+        <p:blipFill>
+          <a:blip r:embed="rId2"/>
+          <a:stretch>
+            <a:fillRect/>
+          </a:stretch>
+        </p:blipFill>
+        <p:spPr>
+          <a:xfrm>
+            <a:off x="1370940" y="1838103"/>
+            <a:ext cx="9450119" cy="3181794"/>
+          </a:xfrm>
+          <a:prstGeom prst="rect">
+            <a:avLst/>
+          </a:prstGeom>
+        </p:spPr>
+      </p:pic>
+      <p:pic>
+        <p:nvPicPr>
+          <p:cNvPr id="6" name="Image 5">
+            <a:extLst>
+              <a:ext uri="{FF2B5EF4-FFF2-40B4-BE49-F238E27FC236}">
+                <a16:creationId xmlns:a16="http://schemas.microsoft.com/office/drawing/2014/main" id="{2CFD66DC-A1AE-E5E9-7F88-BEF2EB621C0A}"/>
+              </a:ext>
+            </a:extLst>
+          </p:cNvPr>
+          <p:cNvPicPr>
+            <a:picLocks noChangeAspect="1"/>
+          </p:cNvPicPr>
+          <p:nvPr/>
+        </p:nvPicPr>
+        <p:blipFill>
+          <a:blip r:embed="rId2"/>
+          <a:stretch>
+            <a:fillRect/>
+          </a:stretch>
+        </p:blipFill>
+        <p:spPr>
+          <a:xfrm>
+            <a:off x="1370940" y="1838103"/>
+            <a:ext cx="9450119" cy="3181794"/>
+          </a:xfrm>
+          <a:prstGeom prst="rect">
+            <a:avLst/>
+          </a:prstGeom>
+        </p:spPr>
+      </p:pic>
+      <p:pic>
+        <p:nvPicPr>
+          <p:cNvPr id="8" name="Image 7">
+            <a:extLst>
+              <a:ext uri="{FF2B5EF4-FFF2-40B4-BE49-F238E27FC236}">
+                <a16:creationId xmlns:a16="http://schemas.microsoft.com/office/drawing/2014/main" id="{FD721124-2047-3F91-6ADE-A53A5982D54B}"/>
+              </a:ext>
+            </a:extLst>
+          </p:cNvPr>
+          <p:cNvPicPr>
+            <a:picLocks noChangeAspect="1"/>
+          </p:cNvPicPr>
+          <p:nvPr/>
+        </p:nvPicPr>
+        <p:blipFill>
+          <a:blip r:embed="rId2"/>
+          <a:stretch>
+            <a:fillRect/>
+          </a:stretch>
+        </p:blipFill>
+        <p:spPr>
+          <a:xfrm>
+            <a:off x="827475" y="1838103"/>
+            <a:ext cx="10272000" cy="3458516"/>
+          </a:xfrm>
+          <a:prstGeom prst="rect">
+            <a:avLst/>
+          </a:prstGeom>
+        </p:spPr>
+      </p:pic>
+      <p:sp>
+        <p:nvSpPr>
+          <p:cNvPr id="10" name="Titre 1">
+            <a:extLst>
+              <a:ext uri="{FF2B5EF4-FFF2-40B4-BE49-F238E27FC236}">
+                <a16:creationId xmlns:a16="http://schemas.microsoft.com/office/drawing/2014/main" id="{40110F51-F1C4-BB3D-B356-1F310CEAF35F}"/>
+              </a:ext>
+            </a:extLst>
+          </p:cNvPr>
+          <p:cNvSpPr txBox="1">
+            <a:spLocks/>
+          </p:cNvSpPr>
+          <p:nvPr/>
+        </p:nvSpPr>
+        <p:spPr>
+          <a:xfrm>
+            <a:off x="990600" y="517525"/>
+            <a:ext cx="10515600" cy="1325563"/>
+          </a:xfrm>
+          <a:prstGeom prst="rect">
+            <a:avLst/>
+          </a:prstGeom>
+        </p:spPr>
+        <p:txBody>
+          <a:bodyPr/>
+          <a:lstStyle>
+            <a:lvl1pPr algn="l" defTabSz="914400" rtl="0" eaLnBrk="1" latinLnBrk="0" hangingPunct="1">
+              <a:lnSpc>
+                <a:spcPct val="90000"/>
+              </a:lnSpc>
+              <a:spcBef>
+                <a:spcPct val="0"/>
+              </a:spcBef>
+              <a:buNone/>
+              <a:defRPr sz="4000" kern="1200">
+                <a:solidFill>
+                  <a:schemeClr val="tx1"/>
+                </a:solidFill>
+                <a:latin typeface="Georgia" panose="02040502050405020303" pitchFamily="18" charset="0"/>
+                <a:ea typeface="+mj-ea"/>
+                <a:cs typeface="Frank Ruhl Hofshi" panose="00000500000000000000" pitchFamily="50" charset="-79"/>
+              </a:defRPr>
+            </a:lvl1pPr>
+          </a:lstStyle>
+          <a:p>
+            <a:r>
+              <a:rPr lang="fr-FR" sz="3600" dirty="0">
+                <a:latin typeface="Bahnschrift SemiLight" panose="020B0502040204020203" pitchFamily="34" charset="0"/>
+                <a:ea typeface="+mn-ea"/>
+              </a:rPr>
+              <a:t>Voie d’admission et profil académique</a:t>
+            </a:r>
+          </a:p>
+        </p:txBody>
+      </p:sp>
+    </p:spTree>
+    <p:extLst>
+      <p:ext uri="{BB962C8B-B14F-4D97-AF65-F5344CB8AC3E}">
+        <p14:creationId xmlns:p14="http://schemas.microsoft.com/office/powerpoint/2010/main" val="1865517397"/>
+      </p:ext>
+    </p:extLst>
+  </p:cSld>
+  <p:clrMapOvr>
+    <a:masterClrMapping/>
+  </p:clrMapOvr>
+</p:sld>
+</file>
+
+<file path=ppt/slides/slide25.xml><?xml version="1.0" encoding="utf-8"?>
+<p:sld xmlns:a="http://schemas.openxmlformats.org/drawingml/2006/main" xmlns:r="http://schemas.openxmlformats.org/officeDocument/2006/relationships" xmlns:p="http://schemas.openxmlformats.org/presentationml/2006/main">
+  <p:cSld>
+    <p:spTree>
+      <p:nvGrpSpPr>
+        <p:cNvPr id="1" name="">
+          <a:extLst>
+            <a:ext uri="{FF2B5EF4-FFF2-40B4-BE49-F238E27FC236}">
+              <a16:creationId xmlns:a16="http://schemas.microsoft.com/office/drawing/2014/main" id="{EA0909E8-6457-112D-DE57-A41976581675}"/>
+            </a:ext>
+          </a:extLst>
+        </p:cNvPr>
+        <p:cNvGrpSpPr/>
+        <p:nvPr/>
+      </p:nvGrpSpPr>
+      <p:grpSpPr>
+        <a:xfrm>
+          <a:off x="0" y="0"/>
+          <a:ext cx="0" cy="0"/>
+          <a:chOff x="0" y="0"/>
+          <a:chExt cx="0" cy="0"/>
+        </a:xfrm>
+      </p:grpSpPr>
+      <p:pic>
+        <p:nvPicPr>
+          <p:cNvPr id="4" name="Image 3">
+            <a:extLst>
+              <a:ext uri="{FF2B5EF4-FFF2-40B4-BE49-F238E27FC236}">
+                <a16:creationId xmlns:a16="http://schemas.microsoft.com/office/drawing/2014/main" id="{10A23E33-EA96-7D4C-59A3-D57672983EA1}"/>
+              </a:ext>
+            </a:extLst>
+          </p:cNvPr>
+          <p:cNvPicPr>
+            <a:picLocks noChangeAspect="1"/>
+          </p:cNvPicPr>
+          <p:nvPr/>
+        </p:nvPicPr>
+        <p:blipFill>
+          <a:blip r:embed="rId2"/>
+          <a:stretch>
+            <a:fillRect/>
+          </a:stretch>
+        </p:blipFill>
+        <p:spPr>
+          <a:xfrm>
+            <a:off x="1841703" y="1277522"/>
+            <a:ext cx="8249801" cy="5096586"/>
+          </a:xfrm>
+          <a:prstGeom prst="rect">
+            <a:avLst/>
+          </a:prstGeom>
+        </p:spPr>
+      </p:pic>
+      <p:sp>
+        <p:nvSpPr>
+          <p:cNvPr id="7" name="Titre 1">
+            <a:extLst>
+              <a:ext uri="{FF2B5EF4-FFF2-40B4-BE49-F238E27FC236}">
+                <a16:creationId xmlns:a16="http://schemas.microsoft.com/office/drawing/2014/main" id="{4BDAFB59-6FA7-7C70-4373-D52F8838E62E}"/>
+              </a:ext>
+            </a:extLst>
+          </p:cNvPr>
+          <p:cNvSpPr txBox="1">
+            <a:spLocks/>
+          </p:cNvSpPr>
+          <p:nvPr/>
+        </p:nvSpPr>
+        <p:spPr>
+          <a:xfrm>
+            <a:off x="990600" y="517525"/>
+            <a:ext cx="10515600" cy="1325563"/>
+          </a:xfrm>
+          <a:prstGeom prst="rect">
+            <a:avLst/>
+          </a:prstGeom>
+        </p:spPr>
+        <p:txBody>
+          <a:bodyPr/>
+          <a:lstStyle>
+            <a:lvl1pPr algn="l" defTabSz="914400" rtl="0" eaLnBrk="1" latinLnBrk="0" hangingPunct="1">
+              <a:lnSpc>
+                <a:spcPct val="90000"/>
+              </a:lnSpc>
+              <a:spcBef>
+                <a:spcPct val="0"/>
+              </a:spcBef>
+              <a:buNone/>
+              <a:defRPr sz="4000" kern="1200">
+                <a:solidFill>
+                  <a:schemeClr val="tx1"/>
+                </a:solidFill>
+                <a:latin typeface="Georgia" panose="02040502050405020303" pitchFamily="18" charset="0"/>
+                <a:ea typeface="+mj-ea"/>
+                <a:cs typeface="Frank Ruhl Hofshi" panose="00000500000000000000" pitchFamily="50" charset="-79"/>
+              </a:defRPr>
+            </a:lvl1pPr>
+          </a:lstStyle>
+          <a:p>
+            <a:r>
+              <a:rPr lang="fr-FR" sz="3600" dirty="0">
+                <a:latin typeface="Bahnschrift SemiLight" panose="020B0502040204020203" pitchFamily="34" charset="0"/>
+                <a:ea typeface="+mn-ea"/>
+              </a:rPr>
+              <a:t>Voie d’admission et profil académique</a:t>
+            </a:r>
+          </a:p>
+        </p:txBody>
+      </p:sp>
+    </p:spTree>
+    <p:extLst>
+      <p:ext uri="{BB962C8B-B14F-4D97-AF65-F5344CB8AC3E}">
+        <p14:creationId xmlns:p14="http://schemas.microsoft.com/office/powerpoint/2010/main" val="2939454816"/>
+      </p:ext>
+    </p:extLst>
+  </p:cSld>
+  <p:clrMapOvr>
+    <a:masterClrMapping/>
+  </p:clrMapOvr>
+</p:sld>
+</file>
+
+<file path=ppt/slides/slide26.xml><?xml version="1.0" encoding="utf-8"?>
+<p:sld xmlns:a="http://schemas.openxmlformats.org/drawingml/2006/main" xmlns:r="http://schemas.openxmlformats.org/officeDocument/2006/relationships" xmlns:p="http://schemas.openxmlformats.org/presentationml/2006/main">
+  <p:cSld>
+    <p:spTree>
+      <p:nvGrpSpPr>
+        <p:cNvPr id="1" name=""/>
+        <p:cNvGrpSpPr/>
+        <p:nvPr/>
+      </p:nvGrpSpPr>
+      <p:grpSpPr>
+        <a:xfrm>
+          <a:off x="0" y="0"/>
+          <a:ext cx="0" cy="0"/>
+          <a:chOff x="0" y="0"/>
+          <a:chExt cx="0" cy="0"/>
+        </a:xfrm>
+      </p:grpSpPr>
+      <p:pic>
+        <p:nvPicPr>
+          <p:cNvPr id="5" name="Image 4">
+            <a:extLst>
+              <a:ext uri="{FF2B5EF4-FFF2-40B4-BE49-F238E27FC236}">
+                <a16:creationId xmlns:a16="http://schemas.microsoft.com/office/drawing/2014/main" id="{0993624C-5BAA-A03E-EA5C-CFD00DC2139C}"/>
+              </a:ext>
+            </a:extLst>
+          </p:cNvPr>
+          <p:cNvPicPr>
+            <a:picLocks noChangeAspect="1"/>
+          </p:cNvPicPr>
+          <p:nvPr/>
+        </p:nvPicPr>
+        <p:blipFill>
+          <a:blip r:embed="rId2"/>
+          <a:stretch>
+            <a:fillRect/>
+          </a:stretch>
+        </p:blipFill>
+        <p:spPr>
+          <a:xfrm>
+            <a:off x="1407774" y="1323370"/>
+            <a:ext cx="8202170" cy="5077534"/>
+          </a:xfrm>
+          <a:prstGeom prst="rect">
+            <a:avLst/>
+          </a:prstGeom>
+        </p:spPr>
+      </p:pic>
+      <p:sp>
+        <p:nvSpPr>
+          <p:cNvPr id="7" name="Titre 1">
+            <a:extLst>
+              <a:ext uri="{FF2B5EF4-FFF2-40B4-BE49-F238E27FC236}">
+                <a16:creationId xmlns:a16="http://schemas.microsoft.com/office/drawing/2014/main" id="{1EC1D0A8-2F22-38A8-18A5-E355880FF05E}"/>
+              </a:ext>
+            </a:extLst>
+          </p:cNvPr>
+          <p:cNvSpPr txBox="1">
+            <a:spLocks/>
+          </p:cNvSpPr>
+          <p:nvPr/>
+        </p:nvSpPr>
+        <p:spPr>
+          <a:xfrm>
+            <a:off x="990600" y="517525"/>
+            <a:ext cx="10515600" cy="1325563"/>
+          </a:xfrm>
+          <a:prstGeom prst="rect">
+            <a:avLst/>
+          </a:prstGeom>
+        </p:spPr>
+        <p:txBody>
+          <a:bodyPr/>
+          <a:lstStyle>
+            <a:lvl1pPr algn="l" defTabSz="914400" rtl="0" eaLnBrk="1" latinLnBrk="0" hangingPunct="1">
+              <a:lnSpc>
+                <a:spcPct val="90000"/>
+              </a:lnSpc>
+              <a:spcBef>
+                <a:spcPct val="0"/>
+              </a:spcBef>
+              <a:buNone/>
+              <a:defRPr sz="4000" kern="1200">
+                <a:solidFill>
+                  <a:schemeClr val="tx1"/>
+                </a:solidFill>
+                <a:latin typeface="Georgia" panose="02040502050405020303" pitchFamily="18" charset="0"/>
+                <a:ea typeface="+mj-ea"/>
+                <a:cs typeface="Frank Ruhl Hofshi" panose="00000500000000000000" pitchFamily="50" charset="-79"/>
+              </a:defRPr>
+            </a:lvl1pPr>
+          </a:lstStyle>
+          <a:p>
+            <a:r>
+              <a:rPr lang="fr-FR" sz="3600" dirty="0">
+                <a:latin typeface="Bahnschrift SemiLight" panose="020B0502040204020203" pitchFamily="34" charset="0"/>
+                <a:ea typeface="+mn-ea"/>
+              </a:rPr>
+              <a:t>Les élèves ingénieurs</a:t>
+            </a:r>
+          </a:p>
+        </p:txBody>
+      </p:sp>
+    </p:spTree>
+    <p:extLst>
+      <p:ext uri="{BB962C8B-B14F-4D97-AF65-F5344CB8AC3E}">
+        <p14:creationId xmlns:p14="http://schemas.microsoft.com/office/powerpoint/2010/main" val="2724579891"/>
+      </p:ext>
+    </p:extLst>
+  </p:cSld>
+  <p:clrMapOvr>
+    <a:masterClrMapping/>
+  </p:clrMapOvr>
+</p:sld>
+</file>
+
+<file path=ppt/slides/slide27.xml><?xml version="1.0" encoding="utf-8"?>
+<p:sld xmlns:a="http://schemas.openxmlformats.org/drawingml/2006/main" xmlns:r="http://schemas.openxmlformats.org/officeDocument/2006/relationships" xmlns:p="http://schemas.openxmlformats.org/presentationml/2006/main">
+  <p:cSld>
+    <p:spTree>
+      <p:nvGrpSpPr>
+        <p:cNvPr id="1" name=""/>
+        <p:cNvGrpSpPr/>
+        <p:nvPr/>
+      </p:nvGrpSpPr>
+      <p:grpSpPr>
+        <a:xfrm>
+          <a:off x="0" y="0"/>
+          <a:ext cx="0" cy="0"/>
+          <a:chOff x="0" y="0"/>
+          <a:chExt cx="0" cy="0"/>
+        </a:xfrm>
+      </p:grpSpPr>
+      <p:pic>
+        <p:nvPicPr>
+          <p:cNvPr id="5" name="Image 4">
+            <a:extLst>
+              <a:ext uri="{FF2B5EF4-FFF2-40B4-BE49-F238E27FC236}">
+                <a16:creationId xmlns:a16="http://schemas.microsoft.com/office/drawing/2014/main" id="{86D16E95-5A00-D403-6249-B41FEC08DF94}"/>
+              </a:ext>
+            </a:extLst>
+          </p:cNvPr>
+          <p:cNvPicPr>
+            <a:picLocks noChangeAspect="1"/>
+          </p:cNvPicPr>
+          <p:nvPr/>
+        </p:nvPicPr>
+        <p:blipFill>
+          <a:blip r:embed="rId2"/>
+          <a:stretch>
+            <a:fillRect/>
+          </a:stretch>
+        </p:blipFill>
+        <p:spPr>
+          <a:xfrm>
+            <a:off x="1985389" y="1004549"/>
+            <a:ext cx="8221222" cy="4848902"/>
+          </a:xfrm>
+          <a:prstGeom prst="rect">
+            <a:avLst/>
+          </a:prstGeom>
+        </p:spPr>
+      </p:pic>
+      <p:sp>
+        <p:nvSpPr>
+          <p:cNvPr id="7" name="Titre 1">
+            <a:extLst>
+              <a:ext uri="{FF2B5EF4-FFF2-40B4-BE49-F238E27FC236}">
+                <a16:creationId xmlns:a16="http://schemas.microsoft.com/office/drawing/2014/main" id="{31539C54-DFCC-7D17-A647-0E6C8E192E4E}"/>
+              </a:ext>
+            </a:extLst>
+          </p:cNvPr>
+          <p:cNvSpPr txBox="1">
+            <a:spLocks/>
+          </p:cNvSpPr>
+          <p:nvPr/>
+        </p:nvSpPr>
+        <p:spPr>
+          <a:xfrm>
+            <a:off x="990600" y="517525"/>
+            <a:ext cx="10515600" cy="1325563"/>
+          </a:xfrm>
+          <a:prstGeom prst="rect">
+            <a:avLst/>
+          </a:prstGeom>
+        </p:spPr>
+        <p:txBody>
+          <a:bodyPr/>
+          <a:lstStyle>
+            <a:lvl1pPr algn="l" defTabSz="914400" rtl="0" eaLnBrk="1" latinLnBrk="0" hangingPunct="1">
+              <a:lnSpc>
+                <a:spcPct val="90000"/>
+              </a:lnSpc>
+              <a:spcBef>
+                <a:spcPct val="0"/>
+              </a:spcBef>
+              <a:buNone/>
+              <a:defRPr sz="4000" kern="1200">
+                <a:solidFill>
+                  <a:schemeClr val="tx1"/>
+                </a:solidFill>
+                <a:latin typeface="Georgia" panose="02040502050405020303" pitchFamily="18" charset="0"/>
+                <a:ea typeface="+mj-ea"/>
+                <a:cs typeface="Frank Ruhl Hofshi" panose="00000500000000000000" pitchFamily="50" charset="-79"/>
+              </a:defRPr>
+            </a:lvl1pPr>
+          </a:lstStyle>
+          <a:p>
+            <a:r>
+              <a:rPr lang="fr-FR" sz="3600" dirty="0">
+                <a:latin typeface="Bahnschrift SemiLight" panose="020B0502040204020203" pitchFamily="34" charset="0"/>
+                <a:ea typeface="+mn-ea"/>
+              </a:rPr>
+              <a:t>Les élèves attachés</a:t>
+            </a:r>
+          </a:p>
+        </p:txBody>
+      </p:sp>
+    </p:spTree>
+    <p:extLst>
+      <p:ext uri="{BB962C8B-B14F-4D97-AF65-F5344CB8AC3E}">
+        <p14:creationId xmlns:p14="http://schemas.microsoft.com/office/powerpoint/2010/main" val="725556483"/>
+      </p:ext>
+    </p:extLst>
+  </p:cSld>
+  <p:clrMapOvr>
+    <a:masterClrMapping/>
+  </p:clrMapOvr>
+</p:sld>
+</file>
+
+<file path=ppt/slides/slide28.xml><?xml version="1.0" encoding="utf-8"?>
+<p:sld xmlns:a="http://schemas.openxmlformats.org/drawingml/2006/main" xmlns:r="http://schemas.openxmlformats.org/officeDocument/2006/relationships" xmlns:p="http://schemas.openxmlformats.org/presentationml/2006/main">
+  <p:cSld>
+    <p:spTree>
+      <p:nvGrpSpPr>
+        <p:cNvPr id="1" name=""/>
+        <p:cNvGrpSpPr/>
+        <p:nvPr/>
+      </p:nvGrpSpPr>
+      <p:grpSpPr>
+        <a:xfrm>
+          <a:off x="0" y="0"/>
+          <a:ext cx="0" cy="0"/>
+          <a:chOff x="0" y="0"/>
+          <a:chExt cx="0" cy="0"/>
+        </a:xfrm>
+      </p:grpSpPr>
+      <p:pic>
+        <p:nvPicPr>
+          <p:cNvPr id="5" name="Image 4">
+            <a:extLst>
+              <a:ext uri="{FF2B5EF4-FFF2-40B4-BE49-F238E27FC236}">
+                <a16:creationId xmlns:a16="http://schemas.microsoft.com/office/drawing/2014/main" id="{B9DB5338-717A-0181-579B-E561D94B657B}"/>
+              </a:ext>
+            </a:extLst>
+          </p:cNvPr>
+          <p:cNvPicPr>
+            <a:picLocks noChangeAspect="1"/>
+          </p:cNvPicPr>
+          <p:nvPr/>
+        </p:nvPicPr>
+        <p:blipFill>
+          <a:blip r:embed="rId2"/>
+          <a:stretch>
+            <a:fillRect/>
+          </a:stretch>
+        </p:blipFill>
+        <p:spPr>
+          <a:xfrm>
+            <a:off x="1755032" y="1203157"/>
+            <a:ext cx="9275520" cy="5473199"/>
+          </a:xfrm>
+          <a:prstGeom prst="rect">
+            <a:avLst/>
+          </a:prstGeom>
+        </p:spPr>
+      </p:pic>
+      <p:sp>
+        <p:nvSpPr>
+          <p:cNvPr id="7" name="Titre 1">
+            <a:extLst>
+              <a:ext uri="{FF2B5EF4-FFF2-40B4-BE49-F238E27FC236}">
+                <a16:creationId xmlns:a16="http://schemas.microsoft.com/office/drawing/2014/main" id="{CFA0F152-B18F-9D88-1176-5DD0804BB8C0}"/>
+              </a:ext>
+            </a:extLst>
+          </p:cNvPr>
+          <p:cNvSpPr txBox="1">
+            <a:spLocks/>
+          </p:cNvSpPr>
+          <p:nvPr/>
+        </p:nvSpPr>
+        <p:spPr>
+          <a:xfrm>
+            <a:off x="990600" y="517525"/>
+            <a:ext cx="10515600" cy="1325563"/>
+          </a:xfrm>
+          <a:prstGeom prst="rect">
+            <a:avLst/>
+          </a:prstGeom>
+        </p:spPr>
+        <p:txBody>
+          <a:bodyPr/>
+          <a:lstStyle>
+            <a:lvl1pPr algn="l" defTabSz="914400" rtl="0" eaLnBrk="1" latinLnBrk="0" hangingPunct="1">
+              <a:lnSpc>
+                <a:spcPct val="90000"/>
+              </a:lnSpc>
+              <a:spcBef>
+                <a:spcPct val="0"/>
+              </a:spcBef>
+              <a:buNone/>
+              <a:defRPr sz="4000" kern="1200">
+                <a:solidFill>
+                  <a:schemeClr val="tx1"/>
+                </a:solidFill>
+                <a:latin typeface="Georgia" panose="02040502050405020303" pitchFamily="18" charset="0"/>
+                <a:ea typeface="+mj-ea"/>
+                <a:cs typeface="Frank Ruhl Hofshi" panose="00000500000000000000" pitchFamily="50" charset="-79"/>
+              </a:defRPr>
+            </a:lvl1pPr>
+          </a:lstStyle>
+          <a:p>
+            <a:r>
+              <a:rPr lang="fr-FR" sz="3600" dirty="0">
+                <a:latin typeface="Bahnschrift SemiLight" panose="020B0502040204020203" pitchFamily="34" charset="0"/>
+                <a:ea typeface="+mn-ea"/>
+              </a:rPr>
+              <a:t>Voie d’admission et spécialisation - Ingénieurs</a:t>
+            </a:r>
+          </a:p>
+        </p:txBody>
+      </p:sp>
+    </p:spTree>
+    <p:extLst>
+      <p:ext uri="{BB962C8B-B14F-4D97-AF65-F5344CB8AC3E}">
+        <p14:creationId xmlns:p14="http://schemas.microsoft.com/office/powerpoint/2010/main" val="75287475"/>
+      </p:ext>
+    </p:extLst>
+  </p:cSld>
+  <p:clrMapOvr>
+    <a:masterClrMapping/>
+  </p:clrMapOvr>
+</p:sld>
+</file>
+
+<file path=ppt/slides/slide29.xml><?xml version="1.0" encoding="utf-8"?>
+<p:sld xmlns:a="http://schemas.openxmlformats.org/drawingml/2006/main" xmlns:r="http://schemas.openxmlformats.org/officeDocument/2006/relationships" xmlns:p="http://schemas.openxmlformats.org/presentationml/2006/main">
+  <p:cSld>
+    <p:spTree>
+      <p:nvGrpSpPr>
+        <p:cNvPr id="1" name=""/>
+        <p:cNvGrpSpPr/>
+        <p:nvPr/>
+      </p:nvGrpSpPr>
+      <p:grpSpPr>
+        <a:xfrm>
+          <a:off x="0" y="0"/>
+          <a:ext cx="0" cy="0"/>
+          <a:chOff x="0" y="0"/>
+          <a:chExt cx="0" cy="0"/>
+        </a:xfrm>
+      </p:grpSpPr>
+      <p:pic>
+        <p:nvPicPr>
+          <p:cNvPr id="5" name="Image 4">
+            <a:extLst>
+              <a:ext uri="{FF2B5EF4-FFF2-40B4-BE49-F238E27FC236}">
+                <a16:creationId xmlns:a16="http://schemas.microsoft.com/office/drawing/2014/main" id="{76E0AEF6-A98E-B3E9-DF9E-B299CBD267FB}"/>
+              </a:ext>
+            </a:extLst>
+          </p:cNvPr>
+          <p:cNvPicPr>
+            <a:picLocks noChangeAspect="1"/>
+          </p:cNvPicPr>
+          <p:nvPr/>
+        </p:nvPicPr>
+        <p:blipFill>
+          <a:blip r:embed="rId2"/>
+          <a:stretch>
+            <a:fillRect/>
+          </a:stretch>
+        </p:blipFill>
+        <p:spPr>
+          <a:xfrm>
+            <a:off x="1781317" y="1412690"/>
+            <a:ext cx="8249801" cy="4791744"/>
+          </a:xfrm>
+          <a:prstGeom prst="rect">
+            <a:avLst/>
+          </a:prstGeom>
+        </p:spPr>
+      </p:pic>
+      <p:sp>
+        <p:nvSpPr>
+          <p:cNvPr id="9" name="Titre 1">
+            <a:extLst>
+              <a:ext uri="{FF2B5EF4-FFF2-40B4-BE49-F238E27FC236}">
+                <a16:creationId xmlns:a16="http://schemas.microsoft.com/office/drawing/2014/main" id="{850A1D29-E7FF-EA28-2227-0C7CF2EDE126}"/>
+              </a:ext>
+            </a:extLst>
+          </p:cNvPr>
+          <p:cNvSpPr txBox="1">
+            <a:spLocks/>
+          </p:cNvSpPr>
+          <p:nvPr/>
+        </p:nvSpPr>
+        <p:spPr>
+          <a:xfrm>
+            <a:off x="990600" y="517525"/>
+            <a:ext cx="10515600" cy="1325563"/>
+          </a:xfrm>
+          <a:prstGeom prst="rect">
+            <a:avLst/>
+          </a:prstGeom>
+        </p:spPr>
+        <p:txBody>
+          <a:bodyPr/>
+          <a:lstStyle>
+            <a:lvl1pPr algn="l" defTabSz="914400" rtl="0" eaLnBrk="1" latinLnBrk="0" hangingPunct="1">
+              <a:lnSpc>
+                <a:spcPct val="90000"/>
+              </a:lnSpc>
+              <a:spcBef>
+                <a:spcPct val="0"/>
+              </a:spcBef>
+              <a:buNone/>
+              <a:defRPr sz="4000" kern="1200">
+                <a:solidFill>
+                  <a:schemeClr val="tx1"/>
+                </a:solidFill>
+                <a:latin typeface="Georgia" panose="02040502050405020303" pitchFamily="18" charset="0"/>
+                <a:ea typeface="+mj-ea"/>
+                <a:cs typeface="Frank Ruhl Hofshi" panose="00000500000000000000" pitchFamily="50" charset="-79"/>
+              </a:defRPr>
+            </a:lvl1pPr>
+          </a:lstStyle>
+          <a:p>
+            <a:r>
+              <a:rPr lang="fr-FR" sz="3600" dirty="0">
+                <a:latin typeface="Bahnschrift SemiLight" panose="020B0502040204020203" pitchFamily="34" charset="0"/>
+                <a:ea typeface="+mn-ea"/>
+              </a:rPr>
+              <a:t>Voie d’admission et profil académique - Ingénieurs</a:t>
+            </a:r>
+          </a:p>
+        </p:txBody>
+      </p:sp>
+      <p:pic>
+        <p:nvPicPr>
+          <p:cNvPr id="11" name="Image 10">
+            <a:extLst>
+              <a:ext uri="{FF2B5EF4-FFF2-40B4-BE49-F238E27FC236}">
+                <a16:creationId xmlns:a16="http://schemas.microsoft.com/office/drawing/2014/main" id="{EF1126B9-C181-C500-FDB8-BA0EB863988A}"/>
+              </a:ext>
+            </a:extLst>
+          </p:cNvPr>
+          <p:cNvPicPr>
+            <a:picLocks noChangeAspect="1"/>
+          </p:cNvPicPr>
+          <p:nvPr/>
+        </p:nvPicPr>
+        <p:blipFill>
+          <a:blip r:embed="rId3"/>
+          <a:stretch>
+            <a:fillRect/>
+          </a:stretch>
+        </p:blipFill>
+        <p:spPr>
+          <a:xfrm>
+            <a:off x="9746038" y="3609082"/>
+            <a:ext cx="2427271" cy="1100941"/>
+          </a:xfrm>
+          <a:prstGeom prst="rect">
+            <a:avLst/>
+          </a:prstGeom>
+        </p:spPr>
+      </p:pic>
+    </p:spTree>
+    <p:extLst>
+      <p:ext uri="{BB962C8B-B14F-4D97-AF65-F5344CB8AC3E}">
+        <p14:creationId xmlns:p14="http://schemas.microsoft.com/office/powerpoint/2010/main" val="2261985350"/>
+      </p:ext>
+    </p:extLst>
+  </p:cSld>
+  <p:clrMapOvr>
+    <a:masterClrMapping/>
+  </p:clrMapOvr>
+</p:sld>
+</file>
+
 <file path=ppt/slides/slide3.xml><?xml version="1.0" encoding="utf-8"?>
 <p:sld xmlns:a="http://schemas.openxmlformats.org/drawingml/2006/main" xmlns:r="http://schemas.openxmlformats.org/officeDocument/2006/relationships" xmlns:p="http://schemas.openxmlformats.org/presentationml/2006/main">
   <p:cSld>
@@ -11270,6 +13170,247 @@
     <p:extLst>
       <p:ext uri="{BB962C8B-B14F-4D97-AF65-F5344CB8AC3E}">
         <p14:creationId xmlns:p14="http://schemas.microsoft.com/office/powerpoint/2010/main" val="3236454165"/>
+      </p:ext>
+    </p:extLst>
+  </p:cSld>
+  <p:clrMapOvr>
+    <a:masterClrMapping/>
+  </p:clrMapOvr>
+</p:sld>
+</file>
+
+<file path=ppt/slides/slide30.xml><?xml version="1.0" encoding="utf-8"?>
+<p:sld xmlns:a="http://schemas.openxmlformats.org/drawingml/2006/main" xmlns:r="http://schemas.openxmlformats.org/officeDocument/2006/relationships" xmlns:p="http://schemas.openxmlformats.org/presentationml/2006/main">
+  <p:cSld>
+    <p:spTree>
+      <p:nvGrpSpPr>
+        <p:cNvPr id="1" name=""/>
+        <p:cNvGrpSpPr/>
+        <p:nvPr/>
+      </p:nvGrpSpPr>
+      <p:grpSpPr>
+        <a:xfrm>
+          <a:off x="0" y="0"/>
+          <a:ext cx="0" cy="0"/>
+          <a:chOff x="0" y="0"/>
+          <a:chExt cx="0" cy="0"/>
+        </a:xfrm>
+      </p:grpSpPr>
+      <p:sp>
+        <p:nvSpPr>
+          <p:cNvPr id="2" name="Titre 1">
+            <a:extLst>
+              <a:ext uri="{FF2B5EF4-FFF2-40B4-BE49-F238E27FC236}">
+                <a16:creationId xmlns:a16="http://schemas.microsoft.com/office/drawing/2014/main" id="{2285C98D-78F6-65B4-E078-661434C36789}"/>
+              </a:ext>
+            </a:extLst>
+          </p:cNvPr>
+          <p:cNvSpPr>
+            <a:spLocks noGrp="1"/>
+          </p:cNvSpPr>
+          <p:nvPr>
+            <p:ph type="title"/>
+          </p:nvPr>
+        </p:nvSpPr>
+        <p:spPr/>
+        <p:txBody>
+          <a:bodyPr/>
+          <a:lstStyle/>
+          <a:p>
+            <a:r>
+              <a:rPr lang="fr-FR" dirty="0">
+                <a:latin typeface="Bahnschrift SemiLight" panose="020B0502040204020203" pitchFamily="34" charset="0"/>
+              </a:rPr>
+              <a:t>Voie d’admission et spécialisation - Attachés</a:t>
+            </a:r>
+            <a:br>
+              <a:rPr lang="fr-FR" dirty="0">
+                <a:latin typeface="Bahnschrift SemiLight" panose="020B0502040204020203" pitchFamily="34" charset="0"/>
+              </a:rPr>
+            </a:br>
+            <a:endParaRPr lang="fr-FR" dirty="0"/>
+          </a:p>
+        </p:txBody>
+      </p:sp>
+      <p:pic>
+        <p:nvPicPr>
+          <p:cNvPr id="5" name="Image 4">
+            <a:extLst>
+              <a:ext uri="{FF2B5EF4-FFF2-40B4-BE49-F238E27FC236}">
+                <a16:creationId xmlns:a16="http://schemas.microsoft.com/office/drawing/2014/main" id="{78F7CCBD-8B31-2CEA-E3D4-A6676EBC3874}"/>
+              </a:ext>
+            </a:extLst>
+          </p:cNvPr>
+          <p:cNvPicPr>
+            <a:picLocks noChangeAspect="1"/>
+          </p:cNvPicPr>
+          <p:nvPr/>
+        </p:nvPicPr>
+        <p:blipFill>
+          <a:blip r:embed="rId2"/>
+          <a:stretch>
+            <a:fillRect/>
+          </a:stretch>
+        </p:blipFill>
+        <p:spPr>
+          <a:xfrm>
+            <a:off x="2139789" y="1520737"/>
+            <a:ext cx="8297433" cy="5087060"/>
+          </a:xfrm>
+          <a:prstGeom prst="rect">
+            <a:avLst/>
+          </a:prstGeom>
+        </p:spPr>
+      </p:pic>
+    </p:spTree>
+    <p:extLst>
+      <p:ext uri="{BB962C8B-B14F-4D97-AF65-F5344CB8AC3E}">
+        <p14:creationId xmlns:p14="http://schemas.microsoft.com/office/powerpoint/2010/main" val="187665148"/>
+      </p:ext>
+    </p:extLst>
+  </p:cSld>
+  <p:clrMapOvr>
+    <a:masterClrMapping/>
+  </p:clrMapOvr>
+</p:sld>
+</file>
+
+<file path=ppt/slides/slide31.xml><?xml version="1.0" encoding="utf-8"?>
+<p:sld xmlns:a="http://schemas.openxmlformats.org/drawingml/2006/main" xmlns:r="http://schemas.openxmlformats.org/officeDocument/2006/relationships" xmlns:p="http://schemas.openxmlformats.org/presentationml/2006/main">
+  <p:cSld>
+    <p:spTree>
+      <p:nvGrpSpPr>
+        <p:cNvPr id="1" name=""/>
+        <p:cNvGrpSpPr/>
+        <p:nvPr/>
+      </p:nvGrpSpPr>
+      <p:grpSpPr>
+        <a:xfrm>
+          <a:off x="0" y="0"/>
+          <a:ext cx="0" cy="0"/>
+          <a:chOff x="0" y="0"/>
+          <a:chExt cx="0" cy="0"/>
+        </a:xfrm>
+      </p:grpSpPr>
+      <p:pic>
+        <p:nvPicPr>
+          <p:cNvPr id="5" name="Image 4">
+            <a:extLst>
+              <a:ext uri="{FF2B5EF4-FFF2-40B4-BE49-F238E27FC236}">
+                <a16:creationId xmlns:a16="http://schemas.microsoft.com/office/drawing/2014/main" id="{45F2FE00-C848-3813-E8E1-1DAB56EFBCD6}"/>
+              </a:ext>
+            </a:extLst>
+          </p:cNvPr>
+          <p:cNvPicPr>
+            <a:picLocks noChangeAspect="1"/>
+          </p:cNvPicPr>
+          <p:nvPr/>
+        </p:nvPicPr>
+        <p:blipFill>
+          <a:blip r:embed="rId2"/>
+          <a:stretch>
+            <a:fillRect/>
+          </a:stretch>
+        </p:blipFill>
+        <p:spPr>
+          <a:xfrm>
+            <a:off x="1994915" y="890233"/>
+            <a:ext cx="8202170" cy="5077534"/>
+          </a:xfrm>
+          <a:prstGeom prst="rect">
+            <a:avLst/>
+          </a:prstGeom>
+        </p:spPr>
+      </p:pic>
+      <p:sp>
+        <p:nvSpPr>
+          <p:cNvPr id="7" name="Titre 1">
+            <a:extLst>
+              <a:ext uri="{FF2B5EF4-FFF2-40B4-BE49-F238E27FC236}">
+                <a16:creationId xmlns:a16="http://schemas.microsoft.com/office/drawing/2014/main" id="{5B832C72-AE21-2FCD-2F4B-27C30B6C09D2}"/>
+              </a:ext>
+            </a:extLst>
+          </p:cNvPr>
+          <p:cNvSpPr txBox="1">
+            <a:spLocks/>
+          </p:cNvSpPr>
+          <p:nvPr/>
+        </p:nvSpPr>
+        <p:spPr>
+          <a:xfrm>
+            <a:off x="990600" y="517525"/>
+            <a:ext cx="10515600" cy="1325563"/>
+          </a:xfrm>
+          <a:prstGeom prst="rect">
+            <a:avLst/>
+          </a:prstGeom>
+        </p:spPr>
+        <p:txBody>
+          <a:bodyPr/>
+          <a:lstStyle>
+            <a:lvl1pPr algn="l" defTabSz="914400" rtl="0" eaLnBrk="1" latinLnBrk="0" hangingPunct="1">
+              <a:lnSpc>
+                <a:spcPct val="90000"/>
+              </a:lnSpc>
+              <a:spcBef>
+                <a:spcPct val="0"/>
+              </a:spcBef>
+              <a:buNone/>
+              <a:defRPr sz="4000" kern="1200">
+                <a:solidFill>
+                  <a:schemeClr val="tx1"/>
+                </a:solidFill>
+                <a:latin typeface="Georgia" panose="02040502050405020303" pitchFamily="18" charset="0"/>
+                <a:ea typeface="+mj-ea"/>
+                <a:cs typeface="Frank Ruhl Hofshi" panose="00000500000000000000" pitchFamily="50" charset="-79"/>
+              </a:defRPr>
+            </a:lvl1pPr>
+          </a:lstStyle>
+          <a:p>
+            <a:r>
+              <a:rPr lang="fr-FR" sz="3600" dirty="0">
+                <a:latin typeface="Bahnschrift SemiLight" panose="020B0502040204020203" pitchFamily="34" charset="0"/>
+                <a:ea typeface="+mn-ea"/>
+              </a:rPr>
+              <a:t>Voie d’admission et profil académique - Attachés</a:t>
+            </a:r>
+          </a:p>
+        </p:txBody>
+      </p:sp>
+      <p:pic>
+        <p:nvPicPr>
+          <p:cNvPr id="9" name="Image 8">
+            <a:extLst>
+              <a:ext uri="{FF2B5EF4-FFF2-40B4-BE49-F238E27FC236}">
+                <a16:creationId xmlns:a16="http://schemas.microsoft.com/office/drawing/2014/main" id="{8C344971-345F-778B-E1CF-8536D2576DAE}"/>
+              </a:ext>
+            </a:extLst>
+          </p:cNvPr>
+          <p:cNvPicPr>
+            <a:picLocks noChangeAspect="1"/>
+          </p:cNvPicPr>
+          <p:nvPr/>
+        </p:nvPicPr>
+        <p:blipFill>
+          <a:blip r:embed="rId3"/>
+          <a:stretch>
+            <a:fillRect/>
+          </a:stretch>
+        </p:blipFill>
+        <p:spPr>
+          <a:xfrm>
+            <a:off x="9930844" y="3117377"/>
+            <a:ext cx="2427271" cy="1100941"/>
+          </a:xfrm>
+          <a:prstGeom prst="rect">
+            <a:avLst/>
+          </a:prstGeom>
+        </p:spPr>
+      </p:pic>
+    </p:spTree>
+    <p:extLst>
+      <p:ext uri="{BB962C8B-B14F-4D97-AF65-F5344CB8AC3E}">
+        <p14:creationId xmlns:p14="http://schemas.microsoft.com/office/powerpoint/2010/main" val="4107162312"/>
       </p:ext>
     </p:extLst>
   </p:cSld>
@@ -14441,6 +16582,15 @@
 </file>
 
 <file path=customXml/item2.xml><?xml version="1.0" encoding="utf-8"?>
+<?mso-contentType ?>
+<FormTemplates xmlns="http://schemas.microsoft.com/sharepoint/v3/contenttype/forms">
+  <Display>DocumentLibraryForm</Display>
+  <Edit>DocumentLibraryForm</Edit>
+  <New>DocumentLibraryForm</New>
+</FormTemplates>
+</file>
+
+<file path=customXml/item3.xml><?xml version="1.0" encoding="utf-8"?>
 <ct:contentTypeSchema xmlns:ct="http://schemas.microsoft.com/office/2006/metadata/contentType" xmlns:ma="http://schemas.microsoft.com/office/2006/metadata/properties/metaAttributes" ct:_="" ma:_="" ma:contentTypeName="Document" ma:contentTypeID="0x010100E55310666E43344DBB97204024C35E51" ma:contentTypeVersion="9" ma:contentTypeDescription="Crée un document." ma:contentTypeScope="" ma:versionID="573ffdbf12c7b695bb28268475d70968">
   <xsd:schema xmlns:xsd="http://www.w3.org/2001/XMLSchema" xmlns:xs="http://www.w3.org/2001/XMLSchema" xmlns:p="http://schemas.microsoft.com/office/2006/metadata/properties" xmlns:ns3="8138461d-bdab-49ac-9f5d-17d936bf67ed" targetNamespace="http://schemas.microsoft.com/office/2006/metadata/properties" ma:root="true" ma:fieldsID="e9846188d7e02216a8bc56714eaf8c98" ns3:_="">
     <xsd:import namespace="8138461d-bdab-49ac-9f5d-17d936bf67ed"/>
@@ -14614,15 +16764,6 @@
 </ct:contentTypeSchema>
 </file>
 
-<file path=customXml/item3.xml><?xml version="1.0" encoding="utf-8"?>
-<?mso-contentType ?>
-<FormTemplates xmlns="http://schemas.microsoft.com/sharepoint/v3/contenttype/forms">
-  <Display>DocumentLibraryForm</Display>
-  <Edit>DocumentLibraryForm</Edit>
-  <New>DocumentLibraryForm</New>
-</FormTemplates>
-</file>
-
 <file path=customXml/itemProps1.xml><?xml version="1.0" encoding="utf-8"?>
 <ds:datastoreItem xmlns:ds="http://schemas.openxmlformats.org/officeDocument/2006/customXml" ds:itemID="{F31EFE21-6212-40E3-9464-BEE2346D99CE}">
   <ds:schemaRefs>
@@ -14640,6 +16781,14 @@
 </file>
 
 <file path=customXml/itemProps2.xml><?xml version="1.0" encoding="utf-8"?>
+<ds:datastoreItem xmlns:ds="http://schemas.openxmlformats.org/officeDocument/2006/customXml" ds:itemID="{192A3D37-6C49-4620-B2B6-76D5704EBC4C}">
+  <ds:schemaRefs>
+    <ds:schemaRef ds:uri="http://schemas.microsoft.com/sharepoint/v3/contenttype/forms"/>
+  </ds:schemaRefs>
+</ds:datastoreItem>
+</file>
+
+<file path=customXml/itemProps3.xml><?xml version="1.0" encoding="utf-8"?>
 <ds:datastoreItem xmlns:ds="http://schemas.openxmlformats.org/officeDocument/2006/customXml" ds:itemID="{C6C6793F-A4AC-4441-9CFB-A91A1258C317}">
   <ds:schemaRefs>
     <ds:schemaRef ds:uri="http://schemas.microsoft.com/office/2006/metadata/contentType"/>
@@ -14657,14 +16806,6 @@
 </ds:datastoreItem>
 </file>
 
-<file path=customXml/itemProps3.xml><?xml version="1.0" encoding="utf-8"?>
-<ds:datastoreItem xmlns:ds="http://schemas.openxmlformats.org/officeDocument/2006/customXml" ds:itemID="{192A3D37-6C49-4620-B2B6-76D5704EBC4C}">
-  <ds:schemaRefs>
-    <ds:schemaRef ds:uri="http://schemas.microsoft.com/sharepoint/v3/contenttype/forms"/>
-  </ds:schemaRefs>
-</ds:datastoreItem>
-</file>
-
 <file path=docMetadata/LabelInfo.xml><?xml version="1.0" encoding="utf-8"?>
 <clbl:labelList xmlns:clbl="http://schemas.microsoft.com/office/2020/mipLabelMetadata">
   <clbl:label id="{99578065-47e8-4c36-bbf8-4e1228cfb056}" enabled="0" method="" siteId="{99578065-47e8-4c36-bbf8-4e1228cfb056}" removed="1"/>
